--- a/assets/pptx/catalog-339.pptx
+++ b/assets/pptx/catalog-339.pptx
@@ -3527,7 +3527,7 @@
                 <a:ea typeface="Ebrima"/>
                 <a:cs typeface="Ebrima"/>
               </a:rPr>
-              <a:t>አዝ ማረኝ ማረኝ ጌታ ማረኝ (2x)</a:t>
+              <a:t>አዝ ማረኝ ማረኝ ጌታ ማረኝ 2x</a:t>
             </a:r>
           </a:p>
           <a:p>
@@ -3769,7 +3769,7 @@
                 <a:ea typeface="Ebrima"/>
                 <a:cs typeface="Ebrima"/>
               </a:rPr>
-              <a:t>አዝ ማረኝ ማረኝ ጌታ ማረኝ (2x)</a:t>
+              <a:t>አዝ ማረኝ ማረኝ ጌታ ማረኝ 2x</a:t>
             </a:r>
           </a:p>
           <a:p>
@@ -4011,7 +4011,7 @@
                 <a:ea typeface="Ebrima"/>
                 <a:cs typeface="Ebrima"/>
               </a:rPr>
-              <a:t>አዝ ማረኝ ማረኝ ጌታ ማረኝ (2x)</a:t>
+              <a:t>አዝ ማረኝ ማረኝ ጌታ ማረኝ 2x</a:t>
             </a:r>
           </a:p>
           <a:p>
@@ -4253,7 +4253,7 @@
                 <a:ea typeface="Ebrima"/>
                 <a:cs typeface="Ebrima"/>
               </a:rPr>
-              <a:t>አዝ ማረኝ ማረኝ ጌታ ማረኝ (2x)</a:t>
+              <a:t>አዝ ማረኝ ማረኝ ጌታ ማረኝ 2x</a:t>
             </a:r>
           </a:p>
           <a:p>
